--- a/20260905/slides/0912_하네스비교.pptx
+++ b/20260905/slides/0912_하네스비교.pptx
@@ -41810,131 +41810,7 @@
       </p:sp>
       <p:sp>
         <p:nvSpPr>
-          <p:cNvPr id="12" name="Rounded Rectangle 11"/>
-          <p:cNvSpPr/>
-          <p:nvPr/>
-        </p:nvSpPr>
-        <p:spPr>
-          <a:xfrm>
-            <a:off x="777240" y="5760720"/>
-            <a:ext cx="10607040" cy="548640"/>
-          </a:xfrm>
-          <a:prstGeom prst="roundRect">
-            <a:avLst/>
-          </a:prstGeom>
-          <a:solidFill>
-            <a:srgbClr val="F0F4F8"/>
-          </a:solidFill>
-          <a:ln w="12700">
-            <a:solidFill>
-              <a:srgbClr val="1F5C99"/>
-            </a:solidFill>
-          </a:ln>
-          <a:effectLst/>
-        </p:spPr>
-        <p:style>
-          <a:lnRef idx="1">
-            <a:schemeClr val="accent1"/>
-          </a:lnRef>
-          <a:fillRef idx="3">
-            <a:schemeClr val="accent1"/>
-          </a:fillRef>
-          <a:effectRef idx="2">
-            <a:schemeClr val="accent1"/>
-          </a:effectRef>
-          <a:fontRef idx="minor">
-            <a:schemeClr val="lt1"/>
-          </a:fontRef>
-        </p:style>
-        <p:txBody>
-          <a:bodyPr rtlCol="0" anchor="ctr"/>
-          <a:lstStyle/>
-          <a:p>
-            <a:pPr algn="ctr"/>
-          </a:p>
-        </p:txBody>
-      </p:sp>
-      <p:sp>
-        <p:nvSpPr>
-          <p:cNvPr id="13" name="TextBox 12"/>
-          <p:cNvSpPr txBox="1"/>
-          <p:nvPr/>
-        </p:nvSpPr>
-        <p:spPr>
-          <a:xfrm>
-            <a:off x="941832" y="5779007"/>
-            <a:ext cx="822960" cy="512064"/>
-          </a:xfrm>
-          <a:prstGeom prst="rect">
-            <a:avLst/>
-          </a:prstGeom>
-          <a:noFill/>
-        </p:spPr>
-        <p:txBody>
-          <a:bodyPr wrap="square" anchor="ctr">
-            <a:spAutoFit/>
-          </a:bodyPr>
-          <a:lstStyle/>
-          <a:p>
-            <a:pPr algn="l">
-              <a:spcAft>
-                <a:spcPts val="300"/>
-              </a:spcAft>
-            </a:pPr>
-            <a:r>
-              <a:rPr sz="1000" b="1" i="0">
-                <a:solidFill>
-                  <a:srgbClr val="1F5C99"/>
-                </a:solidFill>
-                <a:latin typeface="Malgun Gothic"/>
-              </a:rPr>
-              <a:t>+심화</a:t>
-            </a:r>
-          </a:p>
-        </p:txBody>
-      </p:sp>
-      <p:sp>
-        <p:nvSpPr>
-          <p:cNvPr id="14" name="TextBox 13"/>
-          <p:cNvSpPr txBox="1"/>
-          <p:nvPr/>
-        </p:nvSpPr>
-        <p:spPr>
-          <a:xfrm>
-            <a:off x="1828800" y="5779007"/>
-            <a:ext cx="9418319" cy="512064"/>
-          </a:xfrm>
-          <a:prstGeom prst="rect">
-            <a:avLst/>
-          </a:prstGeom>
-          <a:noFill/>
-        </p:spPr>
-        <p:txBody>
-          <a:bodyPr wrap="square" anchor="ctr">
-            <a:spAutoFit/>
-          </a:bodyPr>
-          <a:lstStyle/>
-          <a:p>
-            <a:pPr algn="l">
-              <a:spcAft>
-                <a:spcPts val="300"/>
-              </a:spcAft>
-            </a:pPr>
-            <a:r>
-              <a:rPr sz="1000" b="0" i="0">
-                <a:solidFill>
-                  <a:srgbClr val="5A636B"/>
-                </a:solidFill>
-                <a:latin typeface="Malgun Gothic"/>
-              </a:rPr>
-              <a:t>봉투가 같으니 도구를 갈아끼워도 파이프라인이 안 깨진다. RDKit 자리에 BioPython 을 넣은 것이 곧 항체 하네스다 — 하네스 설계에서 가장 재사용성이 높은 부분.</a:t>
-            </a:r>
-          </a:p>
-        </p:txBody>
-      </p:sp>
-      <p:sp>
-        <p:nvSpPr>
-          <p:cNvPr id="15" name="TextBox 14"/>
+          <p:cNvPr id="12" name="TextBox 11"/>
           <p:cNvSpPr txBox="1"/>
           <p:nvPr/>
         </p:nvSpPr>
@@ -45673,131 +45549,7 @@
       </p:sp>
       <p:sp>
         <p:nvSpPr>
-          <p:cNvPr id="34" name="Rounded Rectangle 33"/>
-          <p:cNvSpPr/>
-          <p:nvPr/>
-        </p:nvSpPr>
-        <p:spPr>
-          <a:xfrm>
-            <a:off x="777240" y="5870448"/>
-            <a:ext cx="10607040" cy="548640"/>
-          </a:xfrm>
-          <a:prstGeom prst="roundRect">
-            <a:avLst/>
-          </a:prstGeom>
-          <a:solidFill>
-            <a:srgbClr val="F0F4F8"/>
-          </a:solidFill>
-          <a:ln w="12700">
-            <a:solidFill>
-              <a:srgbClr val="1F5C99"/>
-            </a:solidFill>
-          </a:ln>
-          <a:effectLst/>
-        </p:spPr>
-        <p:style>
-          <a:lnRef idx="1">
-            <a:schemeClr val="accent1"/>
-          </a:lnRef>
-          <a:fillRef idx="3">
-            <a:schemeClr val="accent1"/>
-          </a:fillRef>
-          <a:effectRef idx="2">
-            <a:schemeClr val="accent1"/>
-          </a:effectRef>
-          <a:fontRef idx="minor">
-            <a:schemeClr val="lt1"/>
-          </a:fontRef>
-        </p:style>
-        <p:txBody>
-          <a:bodyPr rtlCol="0" anchor="ctr"/>
-          <a:lstStyle/>
-          <a:p>
-            <a:pPr algn="ctr"/>
-          </a:p>
-        </p:txBody>
-      </p:sp>
-      <p:sp>
-        <p:nvSpPr>
-          <p:cNvPr id="35" name="TextBox 34"/>
-          <p:cNvSpPr txBox="1"/>
-          <p:nvPr/>
-        </p:nvSpPr>
-        <p:spPr>
-          <a:xfrm>
-            <a:off x="941832" y="5888736"/>
-            <a:ext cx="822960" cy="512064"/>
-          </a:xfrm>
-          <a:prstGeom prst="rect">
-            <a:avLst/>
-          </a:prstGeom>
-          <a:noFill/>
-        </p:spPr>
-        <p:txBody>
-          <a:bodyPr wrap="square" anchor="ctr">
-            <a:spAutoFit/>
-          </a:bodyPr>
-          <a:lstStyle/>
-          <a:p>
-            <a:pPr algn="l">
-              <a:spcAft>
-                <a:spcPts val="300"/>
-              </a:spcAft>
-            </a:pPr>
-            <a:r>
-              <a:rPr sz="1000" b="1" i="0">
-                <a:solidFill>
-                  <a:srgbClr val="1F5C99"/>
-                </a:solidFill>
-                <a:latin typeface="Malgun Gothic"/>
-              </a:rPr>
-              <a:t>+심화</a:t>
-            </a:r>
-          </a:p>
-        </p:txBody>
-      </p:sp>
-      <p:sp>
-        <p:nvSpPr>
-          <p:cNvPr id="36" name="TextBox 35"/>
-          <p:cNvSpPr txBox="1"/>
-          <p:nvPr/>
-        </p:nvSpPr>
-        <p:spPr>
-          <a:xfrm>
-            <a:off x="1828800" y="5888736"/>
-            <a:ext cx="9418319" cy="512064"/>
-          </a:xfrm>
-          <a:prstGeom prst="rect">
-            <a:avLst/>
-          </a:prstGeom>
-          <a:noFill/>
-        </p:spPr>
-        <p:txBody>
-          <a:bodyPr wrap="square" anchor="ctr">
-            <a:spAutoFit/>
-          </a:bodyPr>
-          <a:lstStyle/>
-          <a:p>
-            <a:pPr algn="l">
-              <a:spcAft>
-                <a:spcPts val="300"/>
-              </a:spcAft>
-            </a:pPr>
-            <a:r>
-              <a:rPr sz="1000" b="0" i="0">
-                <a:solidFill>
-                  <a:srgbClr val="5A636B"/>
-                </a:solidFill>
-                <a:latin typeface="Malgun Gothic"/>
-              </a:rPr>
-              <a:t>추가된 7조는 전부 '단백질 도메인에서 새로 생긴 날조 양식'을 겨냥한다 — 서열 창작, 모델 함수명 창작, GPU 없이 설계 결과 상상하기. 하네스의 규칙은 사고가 난 자리에서 자란다.</a:t>
-            </a:r>
-          </a:p>
-        </p:txBody>
-      </p:sp>
-      <p:sp>
-        <p:nvSpPr>
-          <p:cNvPr id="37" name="TextBox 36"/>
+          <p:cNvPr id="34" name="TextBox 33"/>
           <p:cNvSpPr txBox="1"/>
           <p:nvPr/>
         </p:nvSpPr>
